--- a/public/retrieval-retrieval-clock-template.pptx
+++ b/public/retrieval-retrieval-clock-template.pptx
@@ -2,13 +2,13 @@
 <file path=ppt/presentation.xml><?xml version="1.0" encoding="utf-8"?>
 <p:presentation xmlns:p="http://schemas.openxmlformats.org/presentationml/2006/main">
   <p:sldMasterIdLst>
-    <p:sldMasterId xmlns:r="http://schemas.openxmlformats.org/officeDocument/2006/relationships" id="2147483648" r:id="Rb596818331cd414f"/>
+    <p:sldMasterId xmlns:r="http://schemas.openxmlformats.org/officeDocument/2006/relationships" id="2147483648" r:id="Reb9d4f8c65b14679"/>
   </p:sldMasterIdLst>
   <p:notesMasterIdLst>
-    <p:notesMasterId xmlns:r="http://schemas.openxmlformats.org/officeDocument/2006/relationships" r:id="Rb443732c9dfd4512"/>
+    <p:notesMasterId xmlns:r="http://schemas.openxmlformats.org/officeDocument/2006/relationships" r:id="Rb851195043c44f4d"/>
   </p:notesMasterIdLst>
   <p:sldIdLst>
-    <p:sldId xmlns:r="http://schemas.openxmlformats.org/officeDocument/2006/relationships" id="256" r:id="R9d9ba67d255c4037"/>
+    <p:sldId xmlns:r="http://schemas.openxmlformats.org/officeDocument/2006/relationships" id="256" r:id="R8d01876a8a6248a3"/>
   </p:sldIdLst>
   <p:sldSz cx="12192000" cy="6858000"/>
   <p:notesSz cx="6858000" cy="9144000"/>
@@ -442,7 +442,7 @@
           <a:lstStyle xmlns:a="http://schemas.openxmlformats.org/drawingml/2006/main"/>
           <a:p xmlns:a="http://schemas.openxmlformats.org/drawingml/2006/main">
             <a:r>
-              <a:t>Teacher setup: Replace bracketed text before teaching. Every text box is editable. Duplicate the slide for checked answers or a second prompt. Keep prompt and answer sides separate when printing cards.</a:t>
+              <a:t>Teacher setup: Replace bracketed text before teaching. All text and shapes are editable. Duplicate the slide for answers or another prompt. For card activities, separate prompt and answer sides before printing.</a:t>
             </a:r>
           </a:p>
           <a:p xmlns:a="http://schemas.openxmlformats.org/drawingml/2006/main">
@@ -452,17 +452,12 @@
           </a:p>
           <a:p xmlns:a="http://schemas.openxmlformats.org/drawingml/2006/main">
             <a:r>
-              <a:t>Activity: Retrieval clock</a:t>
-            </a:r>
-          </a:p>
-          <a:p xmlns:a="http://schemas.openxmlformats.org/drawingml/2006/main">
-            <a:r>
               <a:t>Materials: Paper with a clock divided into labelled topic sections</a:t>
             </a:r>
           </a:p>
           <a:p xmlns:a="http://schemas.openxmlformats.org/drawingml/2006/main">
             <a:r>
-              <a:t>Suggested total time including feedback: 10 minutes.</a:t>
+              <a:t>Suggested time including feedback: 10 minutes.</a:t>
             </a:r>
           </a:p>
           <a:p xmlns:a="http://schemas.openxmlformats.org/drawingml/2006/main">
@@ -505,26 +500,6 @@
               <a:t>Adapt: Use fewer sections, larger paper or a simple rectangular grid.</a:t>
             </a:r>
           </a:p>
-          <a:p xmlns:a="http://schemas.openxmlformats.org/drawingml/2006/main">
-            <a:r>
-              <a:t>Credit: Shared clock organiser; TNT retrieval adaptation</a:t>
-            </a:r>
-          </a:p>
-          <a:p xmlns:a="http://schemas.openxmlformats.org/drawingml/2006/main">
-            <a:r>
-              <a:t>No verified sole originator is claimed for this visual organiser. The labels and timings here are TNT guidance, not a research-tested clock protocol.</a:t>
-            </a:r>
-          </a:p>
-          <a:p xmlns:a="http://schemas.openxmlformats.org/drawingml/2006/main">
-            <a:r>
-              <a:t>Source: https://pdf.retrievalpractice.org/RetrievalPracticeGuide.pdf</a:t>
-            </a:r>
-          </a:p>
-          <a:p xmlns:a="http://schemas.openxmlformats.org/drawingml/2006/main">
-            <a:r>
-              <a:t>Full guide: https://tnt-teaching-tools.github.io/cold-call-classroom/retrieval-retrieval-clock.html</a:t>
-            </a:r>
-          </a:p>
         </p:txBody>
       </p:sp>
       <p:sp>
@@ -569,7 +544,7 @@
           <p:cNvPr id="4" name="Accent rule">
             <a:extLst xmlns:a="http://schemas.openxmlformats.org/drawingml/2006/main">
               <a:ext uri="{FF2B5EF4-FFF2-40B4-BE49-F238E27FC236}">
-                <a16:creationId xmlns:a16="http://schemas.microsoft.com/office/drawing/2014/main" id="{CFC67C39-E797-426A-A9BE-AA34172A4D0F}"/>
+                <a16:creationId xmlns:a16="http://schemas.microsoft.com/office/drawing/2014/main" id="{E4DC1F82-D384-4CF4-8640-181E0C78A411}"/>
               </a:ext>
             </a:extLst>
           </p:cNvPr>
@@ -600,7 +575,7 @@
           <p:cNvPr id="2" name="Title">
             <a:extLst xmlns:a="http://schemas.openxmlformats.org/drawingml/2006/main">
               <a:ext uri="{FF2B5EF4-FFF2-40B4-BE49-F238E27FC236}">
-                <a16:creationId xmlns:a16="http://schemas.microsoft.com/office/drawing/2014/main" id="{6BA4185B-A8EC-4451-837E-E75A531D2314}"/>
+                <a16:creationId xmlns:a16="http://schemas.microsoft.com/office/drawing/2014/main" id="{2C678338-167E-47D4-84E6-F6B9C7B0B3BF}"/>
               </a:ext>
             </a:extLst>
           </p:cNvPr>
@@ -747,7 +722,7 @@
           <p:cNvPr id="3" name="Subtitle">
             <a:extLst xmlns:a="http://schemas.openxmlformats.org/drawingml/2006/main">
               <a:ext uri="{FF2B5EF4-FFF2-40B4-BE49-F238E27FC236}">
-                <a16:creationId xmlns:a16="http://schemas.microsoft.com/office/drawing/2014/main" id="{ACF58379-410F-4DBE-9137-48C4DC217C01}"/>
+                <a16:creationId xmlns:a16="http://schemas.microsoft.com/office/drawing/2014/main" id="{C4256B2E-6622-4992-B1B4-4B1F4746BA19}"/>
               </a:ext>
             </a:extLst>
           </p:cNvPr>
@@ -911,7 +886,7 @@
           <p:cNvPr id="3" name="Accent rule">
             <a:extLst xmlns:a="http://schemas.openxmlformats.org/drawingml/2006/main">
               <a:ext uri="{FF2B5EF4-FFF2-40B4-BE49-F238E27FC236}">
-                <a16:creationId xmlns:a16="http://schemas.microsoft.com/office/drawing/2014/main" id="{FDEB0C28-2B4D-42C0-AEF8-50C79C0A2C85}"/>
+                <a16:creationId xmlns:a16="http://schemas.microsoft.com/office/drawing/2014/main" id="{D1B3D89F-114A-415B-80EC-B72FA26B887B}"/>
               </a:ext>
             </a:extLst>
           </p:cNvPr>
@@ -942,7 +917,7 @@
           <p:cNvPr id="2" name="Section title">
             <a:extLst xmlns:a="http://schemas.openxmlformats.org/drawingml/2006/main">
               <a:ext uri="{FF2B5EF4-FFF2-40B4-BE49-F238E27FC236}">
-                <a16:creationId xmlns:a16="http://schemas.microsoft.com/office/drawing/2014/main" id="{5176281E-262C-4C2F-B17F-80546625DDCD}"/>
+                <a16:creationId xmlns:a16="http://schemas.microsoft.com/office/drawing/2014/main" id="{2CD35F6B-AE40-49A2-B32C-1EC9E3591171}"/>
               </a:ext>
             </a:extLst>
           </p:cNvPr>
@@ -1106,7 +1081,7 @@
           <p:cNvPr id="4" name="Accent rule">
             <a:extLst xmlns:a="http://schemas.openxmlformats.org/drawingml/2006/main">
               <a:ext uri="{FF2B5EF4-FFF2-40B4-BE49-F238E27FC236}">
-                <a16:creationId xmlns:a16="http://schemas.microsoft.com/office/drawing/2014/main" id="{6679B517-C390-4BA1-AD9D-5D242364E82E}"/>
+                <a16:creationId xmlns:a16="http://schemas.microsoft.com/office/drawing/2014/main" id="{0F24B447-1F46-435F-9EBC-DF202D255F04}"/>
               </a:ext>
             </a:extLst>
           </p:cNvPr>
@@ -1137,7 +1112,7 @@
           <p:cNvPr id="2" name="Title">
             <a:extLst xmlns:a="http://schemas.openxmlformats.org/drawingml/2006/main">
               <a:ext uri="{FF2B5EF4-FFF2-40B4-BE49-F238E27FC236}">
-                <a16:creationId xmlns:a16="http://schemas.microsoft.com/office/drawing/2014/main" id="{689DC2BB-68DD-4CDF-8D7F-6CBF9C7F9681}"/>
+                <a16:creationId xmlns:a16="http://schemas.microsoft.com/office/drawing/2014/main" id="{F4B19630-3DA9-4B0F-95F0-62801373E022}"/>
               </a:ext>
             </a:extLst>
           </p:cNvPr>
@@ -1284,7 +1259,7 @@
           <p:cNvPr id="3" name="Body">
             <a:extLst xmlns:a="http://schemas.openxmlformats.org/drawingml/2006/main">
               <a:ext uri="{FF2B5EF4-FFF2-40B4-BE49-F238E27FC236}">
-                <a16:creationId xmlns:a16="http://schemas.microsoft.com/office/drawing/2014/main" id="{AA48F1A2-5FCE-4EDD-965B-E9BE7F2ADCCA}"/>
+                <a16:creationId xmlns:a16="http://schemas.microsoft.com/office/drawing/2014/main" id="{83E68E03-89F4-4E9B-B3F3-1880E6F5F633}"/>
               </a:ext>
             </a:extLst>
           </p:cNvPr>
@@ -1448,7 +1423,7 @@
           <p:cNvPr id="5" name="Accent rule">
             <a:extLst xmlns:a="http://schemas.openxmlformats.org/drawingml/2006/main">
               <a:ext uri="{FF2B5EF4-FFF2-40B4-BE49-F238E27FC236}">
-                <a16:creationId xmlns:a16="http://schemas.microsoft.com/office/drawing/2014/main" id="{734A0A92-7ADA-4158-8B27-DACC7E09D85D}"/>
+                <a16:creationId xmlns:a16="http://schemas.microsoft.com/office/drawing/2014/main" id="{5B441120-22BA-42FA-9981-183D87121499}"/>
               </a:ext>
             </a:extLst>
           </p:cNvPr>
@@ -1479,7 +1454,7 @@
           <p:cNvPr id="2" name="Title">
             <a:extLst xmlns:a="http://schemas.openxmlformats.org/drawingml/2006/main">
               <a:ext uri="{FF2B5EF4-FFF2-40B4-BE49-F238E27FC236}">
-                <a16:creationId xmlns:a16="http://schemas.microsoft.com/office/drawing/2014/main" id="{F1061C4E-C26F-420E-9797-02F5C7149EA0}"/>
+                <a16:creationId xmlns:a16="http://schemas.microsoft.com/office/drawing/2014/main" id="{698FCDCC-AFE2-4FB9-9E47-3C6909A1C58E}"/>
               </a:ext>
             </a:extLst>
           </p:cNvPr>
@@ -1626,7 +1601,7 @@
           <p:cNvPr id="3" name="Left column">
             <a:extLst xmlns:a="http://schemas.openxmlformats.org/drawingml/2006/main">
               <a:ext uri="{FF2B5EF4-FFF2-40B4-BE49-F238E27FC236}">
-                <a16:creationId xmlns:a16="http://schemas.microsoft.com/office/drawing/2014/main" id="{D0BEC375-3B82-49F2-9060-709A6CC0410C}"/>
+                <a16:creationId xmlns:a16="http://schemas.microsoft.com/office/drawing/2014/main" id="{105C1532-DF96-424B-A511-A2DB5A68A1CC}"/>
               </a:ext>
             </a:extLst>
           </p:cNvPr>
@@ -1773,7 +1748,7 @@
           <p:cNvPr id="4" name="Right column">
             <a:extLst xmlns:a="http://schemas.openxmlformats.org/drawingml/2006/main">
               <a:ext uri="{FF2B5EF4-FFF2-40B4-BE49-F238E27FC236}">
-                <a16:creationId xmlns:a16="http://schemas.microsoft.com/office/drawing/2014/main" id="{D9904027-4D59-4633-8758-9C02CD666CA2}"/>
+                <a16:creationId xmlns:a16="http://schemas.microsoft.com/office/drawing/2014/main" id="{38C94BFB-EA76-41D3-B31C-280AEAB1EAA7}"/>
               </a:ext>
             </a:extLst>
           </p:cNvPr>
@@ -1937,7 +1912,7 @@
           <p:cNvPr id="4" name="Accent rule">
             <a:extLst xmlns:a="http://schemas.openxmlformats.org/drawingml/2006/main">
               <a:ext uri="{FF2B5EF4-FFF2-40B4-BE49-F238E27FC236}">
-                <a16:creationId xmlns:a16="http://schemas.microsoft.com/office/drawing/2014/main" id="{7DAB1D39-9D90-4874-9459-FD9B626C8DEC}"/>
+                <a16:creationId xmlns:a16="http://schemas.microsoft.com/office/drawing/2014/main" id="{D2D08C30-96CB-4568-AA15-829BF4F8A261}"/>
               </a:ext>
             </a:extLst>
           </p:cNvPr>
@@ -1968,7 +1943,7 @@
           <p:cNvPr id="2" name="Title">
             <a:extLst xmlns:a="http://schemas.openxmlformats.org/drawingml/2006/main">
               <a:ext uri="{FF2B5EF4-FFF2-40B4-BE49-F238E27FC236}">
-                <a16:creationId xmlns:a16="http://schemas.microsoft.com/office/drawing/2014/main" id="{639FA31F-002A-415B-92A5-CC17215913A7}"/>
+                <a16:creationId xmlns:a16="http://schemas.microsoft.com/office/drawing/2014/main" id="{0D561B7A-A3C0-452D-92B3-46CD6D164FC3}"/>
               </a:ext>
             </a:extLst>
           </p:cNvPr>
@@ -2115,7 +2090,7 @@
           <p:cNvPr id="3" name="Left column">
             <a:extLst xmlns:a="http://schemas.openxmlformats.org/drawingml/2006/main">
               <a:ext uri="{FF2B5EF4-FFF2-40B4-BE49-F238E27FC236}">
-                <a16:creationId xmlns:a16="http://schemas.microsoft.com/office/drawing/2014/main" id="{DEB090B2-B37C-4838-8E82-2CD06CA638E9}"/>
+                <a16:creationId xmlns:a16="http://schemas.microsoft.com/office/drawing/2014/main" id="{7D31EF70-F6EC-4433-ADD5-5CA26F6DF8F6}"/>
               </a:ext>
             </a:extLst>
           </p:cNvPr>
@@ -2300,12 +2275,12 @@
   </p:cSld>
   <p:clrMap bg1="lt1" tx1="dk1" bg2="lt2" tx2="dk2" accent1="accent1" accent2="accent2" accent3="accent3" accent4="accent4" accent5="accent5" accent6="accent6" hlink="hlink" folHlink="folHlink"/>
   <p:sldLayoutIdLst>
-    <p:sldLayoutId xmlns:r="http://schemas.openxmlformats.org/officeDocument/2006/relationships" id="2147483649" r:id="R4a070168000d4495"/>
-    <p:sldLayoutId xmlns:r="http://schemas.openxmlformats.org/officeDocument/2006/relationships" id="2147483650" r:id="R5287688ada3c4485"/>
-    <p:sldLayoutId xmlns:r="http://schemas.openxmlformats.org/officeDocument/2006/relationships" id="2147483651" r:id="R92b8dd3138c8464a"/>
-    <p:sldLayoutId xmlns:r="http://schemas.openxmlformats.org/officeDocument/2006/relationships" id="2147483652" r:id="Rfdb5e28eaffc44af"/>
-    <p:sldLayoutId xmlns:r="http://schemas.openxmlformats.org/officeDocument/2006/relationships" id="2147483653" r:id="Reee077794b074fa8"/>
-    <p:sldLayoutId xmlns:r="http://schemas.openxmlformats.org/officeDocument/2006/relationships" id="2147483654" r:id="R9c5fe9703f314c9a"/>
+    <p:sldLayoutId xmlns:r="http://schemas.openxmlformats.org/officeDocument/2006/relationships" id="2147483649" r:id="Ra68047029a5a47f1"/>
+    <p:sldLayoutId xmlns:r="http://schemas.openxmlformats.org/officeDocument/2006/relationships" id="2147483650" r:id="Rb4e25f50919b49dd"/>
+    <p:sldLayoutId xmlns:r="http://schemas.openxmlformats.org/officeDocument/2006/relationships" id="2147483651" r:id="Rc43086bbe8ee4b52"/>
+    <p:sldLayoutId xmlns:r="http://schemas.openxmlformats.org/officeDocument/2006/relationships" id="2147483652" r:id="R6620897ea5054af8"/>
+    <p:sldLayoutId xmlns:r="http://schemas.openxmlformats.org/officeDocument/2006/relationships" id="2147483653" r:id="R9e4956a66f264d85"/>
+    <p:sldLayoutId xmlns:r="http://schemas.openxmlformats.org/officeDocument/2006/relationships" id="2147483654" r:id="R79f7a4ec49724759"/>
   </p:sldLayoutIdLst>
   <p:txStyles>
     <p:titleStyle>
@@ -2838,7 +2813,7 @@
     <p:bg>
       <p:bgPr>
         <a:solidFill xmlns:a="http://schemas.openxmlformats.org/drawingml/2006/main">
-          <a:srgbClr val="FFFCF2"/>
+          <a:srgbClr val="FFFDF5"/>
         </a:solidFill>
       </p:bgPr>
     </p:bg>
@@ -2853,10 +2828,10 @@
       </p:grpSpPr>
       <p:sp>
         <p:nvSpPr>
-          <p:cNvPr id="10" name="">
+          <p:cNvPr id="29" name="">
             <a:extLst xmlns:a="http://schemas.openxmlformats.org/drawingml/2006/main">
               <a:ext uri="{FF2B5EF4-FFF2-40B4-BE49-F238E27FC236}">
-                <a16:creationId xmlns:a16="http://schemas.microsoft.com/office/drawing/2014/main" id="{3E90B87D-0E95-4626-95A0-6CB66A297914}"/>
+                <a16:creationId xmlns:a16="http://schemas.microsoft.com/office/drawing/2014/main" id="{ED8EAC83-B9CD-4842-ACFB-0822055793F0}"/>
               </a:ext>
             </a:extLst>
           </p:cNvPr>
@@ -2867,8 +2842,8 @@
         </p:nvSpPr>
         <p:spPr>
           <a:xfrm xmlns:a="http://schemas.openxmlformats.org/drawingml/2006/main">
-            <a:off x="609600" y="333375"/>
-            <a:ext cx="10972800" cy="714375"/>
+            <a:off x="609600" y="323850"/>
+            <a:ext cx="10972800" cy="666750"/>
           </a:xfrm>
           <a:prstGeom xmlns:a="http://schemas.openxmlformats.org/drawingml/2006/main" prst="rect">
             <a:avLst/>
@@ -2885,23 +2860,23 @@
           <a:lstStyle xmlns:a="http://schemas.openxmlformats.org/drawingml/2006/main"/>
           <a:p xmlns:a="http://schemas.openxmlformats.org/drawingml/2006/main">
             <a:pPr>
-              <a:defRPr sz="4050" b="1">
+              <a:defRPr sz="3450" b="1">
                 <a:solidFill>
-                  <a:srgbClr val="242720"/>
+                  <a:srgbClr val="263C3A"/>
                 </a:solidFill>
-                <a:latin typeface="Arial"/>
-                <a:ea typeface="Arial"/>
-                <a:cs typeface="Arial"/>
+                <a:latin typeface="DejaVu Sans"/>
+                <a:ea typeface="DejaVu Sans"/>
+                <a:cs typeface="DejaVu Sans"/>
               </a:defRPr>
             </a:pPr>
             <a:r>
-              <a:rPr sz="4050" b="1">
+              <a:rPr sz="3450" b="1">
                 <a:solidFill>
-                  <a:srgbClr val="242720"/>
+                  <a:srgbClr val="263C3A"/>
                 </a:solidFill>
-                <a:latin typeface="Arial"/>
-                <a:ea typeface="Arial"/>
-                <a:cs typeface="Arial"/>
+                <a:latin typeface="DejaVu Sans"/>
+                <a:ea typeface="DejaVu Sans"/>
+                <a:cs typeface="DejaVu Sans"/>
               </a:rPr>
               <a:t>Retrieval clock</a:t>
             </a:r>
@@ -2913,7 +2888,7 @@
           <p:cNvPr id="2" name="">
             <a:extLst xmlns:a="http://schemas.openxmlformats.org/drawingml/2006/main">
               <a:ext uri="{FF2B5EF4-FFF2-40B4-BE49-F238E27FC236}">
-                <a16:creationId xmlns:a16="http://schemas.microsoft.com/office/drawing/2014/main" id="{605375C2-314B-4D49-A1AE-295D35B69687}"/>
+                <a16:creationId xmlns:a16="http://schemas.microsoft.com/office/drawing/2014/main" id="{0E42AE55-E94F-44C0-B513-789132978C27}"/>
               </a:ext>
             </a:extLst>
           </p:cNvPr>
@@ -2924,8 +2899,8 @@
         </p:nvSpPr>
         <p:spPr>
           <a:xfrm xmlns:a="http://schemas.openxmlformats.org/drawingml/2006/main">
-            <a:off x="609600" y="1190625"/>
-            <a:ext cx="10972800" cy="476250"/>
+            <a:off x="609600" y="1085850"/>
+            <a:ext cx="10972800" cy="409575"/>
           </a:xfrm>
           <a:prstGeom xmlns:a="http://schemas.openxmlformats.org/drawingml/2006/main" prst="rect">
             <a:avLst/>
@@ -2942,25 +2917,25 @@
           <a:lstStyle xmlns:a="http://schemas.openxmlformats.org/drawingml/2006/main"/>
           <a:p xmlns:a="http://schemas.openxmlformats.org/drawingml/2006/main">
             <a:pPr>
-              <a:defRPr sz="2400" b="0">
+              <a:defRPr sz="2175" b="0">
                 <a:solidFill>
-                  <a:srgbClr val="242720"/>
+                  <a:srgbClr val="687572"/>
                 </a:solidFill>
-                <a:latin typeface="Arial"/>
-                <a:ea typeface="Arial"/>
-                <a:cs typeface="Arial"/>
+                <a:latin typeface="DejaVu Sans"/>
+                <a:ea typeface="DejaVu Sans"/>
+                <a:cs typeface="DejaVu Sans"/>
               </a:defRPr>
             </a:pPr>
             <a:r>
-              <a:rPr sz="2400" b="0">
+              <a:rPr sz="2175" b="0">
                 <a:solidFill>
-                  <a:srgbClr val="242720"/>
+                  <a:srgbClr val="687572"/>
                 </a:solidFill>
-                <a:latin typeface="Arial"/>
-                <a:ea typeface="Arial"/>
-                <a:cs typeface="Arial"/>
+                <a:latin typeface="DejaVu Sans"/>
+                <a:ea typeface="DejaVu Sans"/>
+                <a:cs typeface="DejaVu Sans"/>
               </a:rPr>
-              <a:t>[Add your topic or retrieval focus]</a:t>
+              <a:t>[Your topic or retrieval focus]</a:t>
             </a:r>
           </a:p>
         </p:txBody>
@@ -2970,7 +2945,7 @@
           <p:cNvPr id="3" name="">
             <a:extLst xmlns:a="http://schemas.openxmlformats.org/drawingml/2006/main">
               <a:ext uri="{FF2B5EF4-FFF2-40B4-BE49-F238E27FC236}">
-                <a16:creationId xmlns:a16="http://schemas.microsoft.com/office/drawing/2014/main" id="{73EC3515-4C4B-4132-8ABD-F017393D63BD}"/>
+                <a16:creationId xmlns:a16="http://schemas.microsoft.com/office/drawing/2014/main" id="{05689019-2483-4C4F-8AC4-7705E9B195B4}"/>
               </a:ext>
             </a:extLst>
           </p:cNvPr>
@@ -2981,8 +2956,38 @@
         </p:nvSpPr>
         <p:spPr>
           <a:xfrm xmlns:a="http://schemas.openxmlformats.org/drawingml/2006/main">
-            <a:off x="609600" y="1733550"/>
-            <a:ext cx="10972800" cy="400050"/>
+            <a:off x="609600" y="1676400"/>
+            <a:ext cx="10972800" cy="19050"/>
+          </a:xfrm>
+          <a:prstGeom xmlns:a="http://schemas.openxmlformats.org/drawingml/2006/main" prst="rect">
+            <a:avLst/>
+          </a:prstGeom>
+          <a:solidFill xmlns:a="http://schemas.openxmlformats.org/drawingml/2006/main">
+            <a:srgbClr val="A9BDB7"/>
+          </a:solidFill>
+          <a:ln xmlns:a="http://schemas.openxmlformats.org/drawingml/2006/main" w="0">
+            <a:noFill/>
+          </a:ln>
+        </p:spPr>
+      </p:sp>
+      <p:sp>
+        <p:nvSpPr>
+          <p:cNvPr id="4" name="">
+            <a:extLst xmlns:a="http://schemas.openxmlformats.org/drawingml/2006/main">
+              <a:ext uri="{FF2B5EF4-FFF2-40B4-BE49-F238E27FC236}">
+                <a16:creationId xmlns:a16="http://schemas.microsoft.com/office/drawing/2014/main" id="{5BBF8B00-9A44-4812-B697-8956F47ED782}"/>
+              </a:ext>
+            </a:extLst>
+          </p:cNvPr>
+          <p:cNvSpPr>
+            <a:spLocks xmlns:a="http://schemas.openxmlformats.org/drawingml/2006/main" noGrp="1"/>
+          </p:cNvSpPr>
+          <p:nvPr/>
+        </p:nvSpPr>
+        <p:spPr>
+          <a:xfrm xmlns:a="http://schemas.openxmlformats.org/drawingml/2006/main">
+            <a:off x="609600" y="1828800"/>
+            <a:ext cx="4476750" cy="304800"/>
           </a:xfrm>
           <a:prstGeom xmlns:a="http://schemas.openxmlformats.org/drawingml/2006/main" prst="rect">
             <a:avLst/>
@@ -2999,35 +3004,35 @@
           <a:lstStyle xmlns:a="http://schemas.openxmlformats.org/drawingml/2006/main"/>
           <a:p xmlns:a="http://schemas.openxmlformats.org/drawingml/2006/main">
             <a:pPr>
-              <a:defRPr sz="1800" b="0">
+              <a:defRPr sz="1575" b="1">
                 <a:solidFill>
-                  <a:srgbClr val="28534A"/>
+                  <a:srgbClr val="263C3A"/>
                 </a:solidFill>
-                <a:latin typeface="Arial"/>
-                <a:ea typeface="Arial"/>
-                <a:cs typeface="Arial"/>
+                <a:latin typeface="DejaVu Sans"/>
+                <a:ea typeface="DejaVu Sans"/>
+                <a:cs typeface="DejaVu Sans"/>
               </a:defRPr>
             </a:pPr>
             <a:r>
-              <a:rPr sz="1800" b="0">
+              <a:rPr sz="1575" b="1">
                 <a:solidFill>
-                  <a:srgbClr val="28534A"/>
+                  <a:srgbClr val="263C3A"/>
                 </a:solidFill>
-                <a:latin typeface="Arial"/>
-                <a:ea typeface="Arial"/>
-                <a:cs typeface="Arial"/>
+                <a:latin typeface="DejaVu Sans"/>
+                <a:ea typeface="DejaVu Sans"/>
+                <a:cs typeface="DejaVu Sans"/>
               </a:rPr>
-              <a:t>Recall independently first. Check and improve after feedback.</a:t>
+              <a:t>01  Recall from memory</a:t>
             </a:r>
           </a:p>
         </p:txBody>
       </p:sp>
       <p:sp>
         <p:nvSpPr>
-          <p:cNvPr id="4" name="">
+          <p:cNvPr id="5" name="">
             <a:extLst xmlns:a="http://schemas.openxmlformats.org/drawingml/2006/main">
               <a:ext uri="{FF2B5EF4-FFF2-40B4-BE49-F238E27FC236}">
-                <a16:creationId xmlns:a16="http://schemas.microsoft.com/office/drawing/2014/main" id="{A52E6636-173B-4D2D-931C-271CC1EB5299}"/>
+                <a16:creationId xmlns:a16="http://schemas.microsoft.com/office/drawing/2014/main" id="{F66DA7C7-9B1A-44E8-B585-FAF6B094DCD2}"/>
               </a:ext>
             </a:extLst>
           </p:cNvPr>
@@ -3038,21 +3043,252 @@
         </p:nvSpPr>
         <p:spPr>
           <a:xfrm xmlns:a="http://schemas.openxmlformats.org/drawingml/2006/main">
-            <a:off x="609600" y="2190750"/>
-            <a:ext cx="5400675" cy="1581150"/>
+            <a:off x="6286500" y="1828800"/>
+            <a:ext cx="5048250" cy="304800"/>
           </a:xfrm>
           <a:prstGeom xmlns:a="http://schemas.openxmlformats.org/drawingml/2006/main" prst="rect">
             <a:avLst/>
           </a:prstGeom>
           <a:noFill xmlns:a="http://schemas.openxmlformats.org/drawingml/2006/main"/>
+          <a:ln xmlns:a="http://schemas.openxmlformats.org/drawingml/2006/main" w="0">
+            <a:noFill/>
+          </a:ln>
+        </p:spPr>
+        <p:txBody>
+          <a:bodyPr xmlns:a="http://schemas.openxmlformats.org/drawingml/2006/main" lIns="0" tIns="0" rIns="0" bIns="0" anchor="t">
+            <a:noAutofit/>
+          </a:bodyPr>
+          <a:lstStyle xmlns:a="http://schemas.openxmlformats.org/drawingml/2006/main"/>
+          <a:p xmlns:a="http://schemas.openxmlformats.org/drawingml/2006/main">
+            <a:pPr>
+              <a:defRPr sz="1575" b="1">
+                <a:solidFill>
+                  <a:srgbClr val="263C3A"/>
+                </a:solidFill>
+                <a:latin typeface="DejaVu Sans"/>
+                <a:ea typeface="DejaVu Sans"/>
+                <a:cs typeface="DejaVu Sans"/>
+              </a:defRPr>
+            </a:pPr>
+            <a:r>
+              <a:rPr sz="1575" b="1">
+                <a:solidFill>
+                  <a:srgbClr val="263C3A"/>
+                </a:solidFill>
+                <a:latin typeface="DejaVu Sans"/>
+                <a:ea typeface="DejaVu Sans"/>
+                <a:cs typeface="DejaVu Sans"/>
+              </a:rPr>
+              <a:t>02  Check and improve</a:t>
+            </a:r>
+          </a:p>
+        </p:txBody>
+      </p:sp>
+      <p:sp>
+        <p:nvSpPr>
+          <p:cNvPr id="6" name="">
+            <a:extLst xmlns:a="http://schemas.openxmlformats.org/drawingml/2006/main">
+              <a:ext uri="{FF2B5EF4-FFF2-40B4-BE49-F238E27FC236}">
+                <a16:creationId xmlns:a16="http://schemas.microsoft.com/office/drawing/2014/main" id="{4E9D0A9A-B044-41C0-8B28-2CDF07E007F7}"/>
+              </a:ext>
+            </a:extLst>
+          </p:cNvPr>
+          <p:cNvSpPr>
+            <a:spLocks xmlns:a="http://schemas.openxmlformats.org/drawingml/2006/main" noGrp="1"/>
+          </p:cNvSpPr>
+          <p:nvPr/>
+        </p:nvSpPr>
+        <p:spPr>
+          <a:xfrm xmlns:a="http://schemas.openxmlformats.org/drawingml/2006/main">
+            <a:off x="609600" y="2247900"/>
+            <a:ext cx="5400675" cy="1600200"/>
+          </a:xfrm>
+          <a:prstGeom xmlns:a="http://schemas.openxmlformats.org/drawingml/2006/main" prst="rect">
+            <a:avLst/>
+          </a:prstGeom>
+          <a:solidFill xmlns:a="http://schemas.openxmlformats.org/drawingml/2006/main">
+            <a:srgbClr val="EDF2F5"/>
+          </a:solidFill>
           <a:ln xmlns:a="http://schemas.openxmlformats.org/drawingml/2006/main" w="9525">
             <a:solidFill>
-              <a:srgbClr val="CBD0C4"/>
+              <a:srgbClr val="D4DFDB"/>
             </a:solidFill>
           </a:ln>
         </p:spPr>
+      </p:sp>
+      <p:sp>
+        <p:nvSpPr>
+          <p:cNvPr id="7" name="">
+            <a:extLst xmlns:a="http://schemas.openxmlformats.org/drawingml/2006/main">
+              <a:ext uri="{FF2B5EF4-FFF2-40B4-BE49-F238E27FC236}">
+                <a16:creationId xmlns:a16="http://schemas.microsoft.com/office/drawing/2014/main" id="{A40480AB-AD46-459C-B422-FD057363A13D}"/>
+              </a:ext>
+            </a:extLst>
+          </p:cNvPr>
+          <p:cNvSpPr>
+            <a:spLocks xmlns:a="http://schemas.openxmlformats.org/drawingml/2006/main" noGrp="1"/>
+          </p:cNvSpPr>
+          <p:nvPr/>
+        </p:nvSpPr>
+        <p:spPr>
+          <a:xfrm xmlns:a="http://schemas.openxmlformats.org/drawingml/2006/main">
+            <a:off x="800100" y="2419350"/>
+            <a:ext cx="381000" cy="381000"/>
+          </a:xfrm>
+          <a:prstGeom xmlns:a="http://schemas.openxmlformats.org/drawingml/2006/main" prst="ellipse">
+            <a:avLst/>
+          </a:prstGeom>
+          <a:solidFill xmlns:a="http://schemas.openxmlformats.org/drawingml/2006/main">
+            <a:srgbClr val="FFFFFF"/>
+          </a:solidFill>
+          <a:ln xmlns:a="http://schemas.openxmlformats.org/drawingml/2006/main" w="0">
+            <a:noFill/>
+          </a:ln>
+        </p:spPr>
+      </p:sp>
+      <p:sp>
+        <p:nvSpPr>
+          <p:cNvPr id="8" name="">
+            <a:extLst xmlns:a="http://schemas.openxmlformats.org/drawingml/2006/main">
+              <a:ext uri="{FF2B5EF4-FFF2-40B4-BE49-F238E27FC236}">
+                <a16:creationId xmlns:a16="http://schemas.microsoft.com/office/drawing/2014/main" id="{36ACB1DD-C8D0-4193-9D0D-BA5DD96FCD1C}"/>
+              </a:ext>
+            </a:extLst>
+          </p:cNvPr>
+          <p:cNvSpPr>
+            <a:spLocks xmlns:a="http://schemas.openxmlformats.org/drawingml/2006/main" noGrp="1"/>
+          </p:cNvSpPr>
+          <p:nvPr/>
+        </p:nvSpPr>
+        <p:spPr>
+          <a:xfrm xmlns:a="http://schemas.openxmlformats.org/drawingml/2006/main">
+            <a:off x="857250" y="2486025"/>
+            <a:ext cx="342900" cy="285750"/>
+          </a:xfrm>
+          <a:prstGeom xmlns:a="http://schemas.openxmlformats.org/drawingml/2006/main" prst="rect">
+            <a:avLst/>
+          </a:prstGeom>
+          <a:noFill xmlns:a="http://schemas.openxmlformats.org/drawingml/2006/main"/>
+          <a:ln xmlns:a="http://schemas.openxmlformats.org/drawingml/2006/main" w="0">
+            <a:noFill/>
+          </a:ln>
+        </p:spPr>
         <p:txBody>
-          <a:bodyPr xmlns:a="http://schemas.openxmlformats.org/drawingml/2006/main" lIns="142875" tIns="114300" rIns="142875" bIns="0" anchor="t">
+          <a:bodyPr xmlns:a="http://schemas.openxmlformats.org/drawingml/2006/main" lIns="0" tIns="0" rIns="0" bIns="0" anchor="t">
+            <a:noAutofit/>
+          </a:bodyPr>
+          <a:lstStyle xmlns:a="http://schemas.openxmlformats.org/drawingml/2006/main"/>
+          <a:p xmlns:a="http://schemas.openxmlformats.org/drawingml/2006/main">
+            <a:pPr>
+              <a:defRPr sz="1350" b="1">
+                <a:solidFill>
+                  <a:srgbClr val="263C3A"/>
+                </a:solidFill>
+                <a:latin typeface="DejaVu Sans"/>
+                <a:ea typeface="DejaVu Sans"/>
+                <a:cs typeface="DejaVu Sans"/>
+              </a:defRPr>
+            </a:pPr>
+            <a:r>
+              <a:rPr sz="1350" b="1">
+                <a:solidFill>
+                  <a:srgbClr val="263C3A"/>
+                </a:solidFill>
+                <a:latin typeface="DejaVu Sans"/>
+                <a:ea typeface="DejaVu Sans"/>
+                <a:cs typeface="DejaVu Sans"/>
+              </a:rPr>
+              <a:t>01</a:t>
+            </a:r>
+          </a:p>
+        </p:txBody>
+      </p:sp>
+      <p:sp>
+        <p:nvSpPr>
+          <p:cNvPr id="9" name="">
+            <a:extLst xmlns:a="http://schemas.openxmlformats.org/drawingml/2006/main">
+              <a:ext uri="{FF2B5EF4-FFF2-40B4-BE49-F238E27FC236}">
+                <a16:creationId xmlns:a16="http://schemas.microsoft.com/office/drawing/2014/main" id="{3D44A585-6151-4299-9A23-61E342D4E091}"/>
+              </a:ext>
+            </a:extLst>
+          </p:cNvPr>
+          <p:cNvSpPr>
+            <a:spLocks xmlns:a="http://schemas.openxmlformats.org/drawingml/2006/main" noGrp="1"/>
+          </p:cNvSpPr>
+          <p:nvPr/>
+        </p:nvSpPr>
+        <p:spPr>
+          <a:xfrm xmlns:a="http://schemas.openxmlformats.org/drawingml/2006/main">
+            <a:off x="1352550" y="2466975"/>
+            <a:ext cx="4467225" cy="428625"/>
+          </a:xfrm>
+          <a:prstGeom xmlns:a="http://schemas.openxmlformats.org/drawingml/2006/main" prst="rect">
+            <a:avLst/>
+          </a:prstGeom>
+          <a:noFill xmlns:a="http://schemas.openxmlformats.org/drawingml/2006/main"/>
+          <a:ln xmlns:a="http://schemas.openxmlformats.org/drawingml/2006/main" w="0">
+            <a:noFill/>
+          </a:ln>
+        </p:spPr>
+        <p:txBody>
+          <a:bodyPr xmlns:a="http://schemas.openxmlformats.org/drawingml/2006/main" lIns="0" tIns="0" rIns="0" bIns="0" anchor="t">
+            <a:noAutofit/>
+          </a:bodyPr>
+          <a:lstStyle xmlns:a="http://schemas.openxmlformats.org/drawingml/2006/main"/>
+          <a:p xmlns:a="http://schemas.openxmlformats.org/drawingml/2006/main">
+            <a:pPr>
+              <a:defRPr sz="1725" b="1">
+                <a:solidFill>
+                  <a:srgbClr val="263C3A"/>
+                </a:solidFill>
+                <a:latin typeface="DejaVu Sans"/>
+                <a:ea typeface="DejaVu Sans"/>
+                <a:cs typeface="DejaVu Sans"/>
+              </a:defRPr>
+            </a:pPr>
+            <a:r>
+              <a:rPr sz="1725" b="1">
+                <a:solidFill>
+                  <a:srgbClr val="263C3A"/>
+                </a:solidFill>
+                <a:latin typeface="DejaVu Sans"/>
+                <a:ea typeface="DejaVu Sans"/>
+                <a:cs typeface="DejaVu Sans"/>
+              </a:rPr>
+              <a:t>12 to 3</a:t>
+            </a:r>
+          </a:p>
+        </p:txBody>
+      </p:sp>
+      <p:sp>
+        <p:nvSpPr>
+          <p:cNvPr id="10" name="">
+            <a:extLst xmlns:a="http://schemas.openxmlformats.org/drawingml/2006/main">
+              <a:ext uri="{FF2B5EF4-FFF2-40B4-BE49-F238E27FC236}">
+                <a16:creationId xmlns:a16="http://schemas.microsoft.com/office/drawing/2014/main" id="{F18CF15D-9DF9-4A8A-AEEC-5D7B00BD12E0}"/>
+              </a:ext>
+            </a:extLst>
+          </p:cNvPr>
+          <p:cNvSpPr>
+            <a:spLocks xmlns:a="http://schemas.openxmlformats.org/drawingml/2006/main" noGrp="1"/>
+          </p:cNvSpPr>
+          <p:nvPr/>
+        </p:nvSpPr>
+        <p:spPr>
+          <a:xfrm xmlns:a="http://schemas.openxmlformats.org/drawingml/2006/main">
+            <a:off x="819150" y="2990850"/>
+            <a:ext cx="4981575" cy="695325"/>
+          </a:xfrm>
+          <a:prstGeom xmlns:a="http://schemas.openxmlformats.org/drawingml/2006/main" prst="rect">
+            <a:avLst/>
+          </a:prstGeom>
+          <a:noFill xmlns:a="http://schemas.openxmlformats.org/drawingml/2006/main"/>
+          <a:ln xmlns:a="http://schemas.openxmlformats.org/drawingml/2006/main" w="0">
+            <a:noFill/>
+          </a:ln>
+        </p:spPr>
+        <p:txBody>
+          <a:bodyPr xmlns:a="http://schemas.openxmlformats.org/drawingml/2006/main" lIns="0" tIns="0" rIns="0" bIns="0" anchor="t">
             <a:noAutofit/>
           </a:bodyPr>
           <a:lstStyle xmlns:a="http://schemas.openxmlformats.org/drawingml/2006/main"/>
@@ -3060,56 +3296,152 @@
             <a:pPr>
               <a:defRPr sz="1950" b="0">
                 <a:solidFill>
-                  <a:srgbClr val="42473D"/>
+                  <a:srgbClr val="687572"/>
                 </a:solidFill>
-                <a:latin typeface="Arial"/>
-                <a:ea typeface="Arial"/>
-                <a:cs typeface="Arial"/>
+                <a:latin typeface="DejaVu Sans"/>
+                <a:ea typeface="DejaVu Sans"/>
+                <a:cs typeface="DejaVu Sans"/>
               </a:defRPr>
             </a:pPr>
             <a:r>
               <a:rPr sz="1950" b="0">
                 <a:solidFill>
-                  <a:srgbClr val="42473D"/>
+                  <a:srgbClr val="687572"/>
                 </a:solidFill>
-                <a:latin typeface="Arial"/>
-                <a:ea typeface="Arial"/>
-                <a:cs typeface="Arial"/>
+                <a:latin typeface="DejaVu Sans"/>
+                <a:ea typeface="DejaVu Sans"/>
+                <a:cs typeface="DejaVu Sans"/>
               </a:rPr>
-              <a:t>12 to 3</a:t>
+              <a:t>[Your subtopic]</a:t>
             </a:r>
           </a:p>
+        </p:txBody>
+      </p:sp>
+      <p:sp>
+        <p:nvSpPr>
+          <p:cNvPr id="11" name="">
+            <a:extLst xmlns:a="http://schemas.openxmlformats.org/drawingml/2006/main">
+              <a:ext uri="{FF2B5EF4-FFF2-40B4-BE49-F238E27FC236}">
+                <a16:creationId xmlns:a16="http://schemas.microsoft.com/office/drawing/2014/main" id="{3039EB03-A196-4205-9E85-A6CD2C205739}"/>
+              </a:ext>
+            </a:extLst>
+          </p:cNvPr>
+          <p:cNvSpPr>
+            <a:spLocks xmlns:a="http://schemas.openxmlformats.org/drawingml/2006/main" noGrp="1"/>
+          </p:cNvSpPr>
+          <p:nvPr/>
+        </p:nvSpPr>
+        <p:spPr>
+          <a:xfrm xmlns:a="http://schemas.openxmlformats.org/drawingml/2006/main">
+            <a:off x="6181725" y="2247900"/>
+            <a:ext cx="5400675" cy="1600200"/>
+          </a:xfrm>
+          <a:prstGeom xmlns:a="http://schemas.openxmlformats.org/drawingml/2006/main" prst="rect">
+            <a:avLst/>
+          </a:prstGeom>
+          <a:solidFill xmlns:a="http://schemas.openxmlformats.org/drawingml/2006/main">
+            <a:srgbClr val="EAF1EC"/>
+          </a:solidFill>
+          <a:ln xmlns:a="http://schemas.openxmlformats.org/drawingml/2006/main" w="9525">
+            <a:solidFill>
+              <a:srgbClr val="D4DFDB"/>
+            </a:solidFill>
+          </a:ln>
+        </p:spPr>
+      </p:sp>
+      <p:sp>
+        <p:nvSpPr>
+          <p:cNvPr id="12" name="">
+            <a:extLst xmlns:a="http://schemas.openxmlformats.org/drawingml/2006/main">
+              <a:ext uri="{FF2B5EF4-FFF2-40B4-BE49-F238E27FC236}">
+                <a16:creationId xmlns:a16="http://schemas.microsoft.com/office/drawing/2014/main" id="{86F67CF6-9683-4612-BBB1-B4FC5B6FE009}"/>
+              </a:ext>
+            </a:extLst>
+          </p:cNvPr>
+          <p:cNvSpPr>
+            <a:spLocks xmlns:a="http://schemas.openxmlformats.org/drawingml/2006/main" noGrp="1"/>
+          </p:cNvSpPr>
+          <p:nvPr/>
+        </p:nvSpPr>
+        <p:spPr>
+          <a:xfrm xmlns:a="http://schemas.openxmlformats.org/drawingml/2006/main">
+            <a:off x="6372225" y="2419350"/>
+            <a:ext cx="381000" cy="381000"/>
+          </a:xfrm>
+          <a:prstGeom xmlns:a="http://schemas.openxmlformats.org/drawingml/2006/main" prst="ellipse">
+            <a:avLst/>
+          </a:prstGeom>
+          <a:solidFill xmlns:a="http://schemas.openxmlformats.org/drawingml/2006/main">
+            <a:srgbClr val="FFFFFF"/>
+          </a:solidFill>
+          <a:ln xmlns:a="http://schemas.openxmlformats.org/drawingml/2006/main" w="0">
+            <a:noFill/>
+          </a:ln>
+        </p:spPr>
+      </p:sp>
+      <p:sp>
+        <p:nvSpPr>
+          <p:cNvPr id="13" name="">
+            <a:extLst xmlns:a="http://schemas.openxmlformats.org/drawingml/2006/main">
+              <a:ext uri="{FF2B5EF4-FFF2-40B4-BE49-F238E27FC236}">
+                <a16:creationId xmlns:a16="http://schemas.microsoft.com/office/drawing/2014/main" id="{74A0E0C4-2CC8-45FF-AC89-3B937FEDCD6D}"/>
+              </a:ext>
+            </a:extLst>
+          </p:cNvPr>
+          <p:cNvSpPr>
+            <a:spLocks xmlns:a="http://schemas.openxmlformats.org/drawingml/2006/main" noGrp="1"/>
+          </p:cNvSpPr>
+          <p:nvPr/>
+        </p:nvSpPr>
+        <p:spPr>
+          <a:xfrm xmlns:a="http://schemas.openxmlformats.org/drawingml/2006/main">
+            <a:off x="6429375" y="2486025"/>
+            <a:ext cx="342900" cy="285750"/>
+          </a:xfrm>
+          <a:prstGeom xmlns:a="http://schemas.openxmlformats.org/drawingml/2006/main" prst="rect">
+            <a:avLst/>
+          </a:prstGeom>
+          <a:noFill xmlns:a="http://schemas.openxmlformats.org/drawingml/2006/main"/>
+          <a:ln xmlns:a="http://schemas.openxmlformats.org/drawingml/2006/main" w="0">
+            <a:noFill/>
+          </a:ln>
+        </p:spPr>
+        <p:txBody>
+          <a:bodyPr xmlns:a="http://schemas.openxmlformats.org/drawingml/2006/main" lIns="0" tIns="0" rIns="0" bIns="0" anchor="t">
+            <a:noAutofit/>
+          </a:bodyPr>
+          <a:lstStyle xmlns:a="http://schemas.openxmlformats.org/drawingml/2006/main"/>
           <a:p xmlns:a="http://schemas.openxmlformats.org/drawingml/2006/main">
             <a:pPr>
-              <a:defRPr sz="1950" b="0">
+              <a:defRPr sz="1350" b="1">
                 <a:solidFill>
-                  <a:srgbClr val="42473D"/>
+                  <a:srgbClr val="263C3A"/>
                 </a:solidFill>
-                <a:latin typeface="Arial"/>
-                <a:ea typeface="Arial"/>
-                <a:cs typeface="Arial"/>
+                <a:latin typeface="DejaVu Sans"/>
+                <a:ea typeface="DejaVu Sans"/>
+                <a:cs typeface="DejaVu Sans"/>
               </a:defRPr>
             </a:pPr>
             <a:r>
-              <a:rPr sz="1950" b="0">
+              <a:rPr sz="1350" b="1">
                 <a:solidFill>
-                  <a:srgbClr val="42473D"/>
+                  <a:srgbClr val="263C3A"/>
                 </a:solidFill>
-                <a:latin typeface="Arial"/>
-                <a:ea typeface="Arial"/>
-                <a:cs typeface="Arial"/>
+                <a:latin typeface="DejaVu Sans"/>
+                <a:ea typeface="DejaVu Sans"/>
+                <a:cs typeface="DejaVu Sans"/>
               </a:rPr>
-              <a:t>[Add a subtopic]</a:t>
+              <a:t>02</a:t>
             </a:r>
           </a:p>
         </p:txBody>
       </p:sp>
       <p:sp>
         <p:nvSpPr>
-          <p:cNvPr id="5" name="">
+          <p:cNvPr id="14" name="">
             <a:extLst xmlns:a="http://schemas.openxmlformats.org/drawingml/2006/main">
               <a:ext uri="{FF2B5EF4-FFF2-40B4-BE49-F238E27FC236}">
-                <a16:creationId xmlns:a16="http://schemas.microsoft.com/office/drawing/2014/main" id="{6AF13CCB-5133-4B65-B1D5-70410DE0F13B}"/>
+                <a16:creationId xmlns:a16="http://schemas.microsoft.com/office/drawing/2014/main" id="{48627FE5-0105-40CE-84AF-65FDE9DA1306}"/>
               </a:ext>
             </a:extLst>
           </p:cNvPr>
@@ -3120,21 +3452,76 @@
         </p:nvSpPr>
         <p:spPr>
           <a:xfrm xmlns:a="http://schemas.openxmlformats.org/drawingml/2006/main">
-            <a:off x="6181725" y="2190750"/>
-            <a:ext cx="5400675" cy="1581150"/>
+            <a:off x="6924675" y="2466975"/>
+            <a:ext cx="4467225" cy="428625"/>
           </a:xfrm>
           <a:prstGeom xmlns:a="http://schemas.openxmlformats.org/drawingml/2006/main" prst="rect">
             <a:avLst/>
           </a:prstGeom>
           <a:noFill xmlns:a="http://schemas.openxmlformats.org/drawingml/2006/main"/>
-          <a:ln xmlns:a="http://schemas.openxmlformats.org/drawingml/2006/main" w="9525">
-            <a:solidFill>
-              <a:srgbClr val="CBD0C4"/>
-            </a:solidFill>
+          <a:ln xmlns:a="http://schemas.openxmlformats.org/drawingml/2006/main" w="0">
+            <a:noFill/>
           </a:ln>
         </p:spPr>
         <p:txBody>
-          <a:bodyPr xmlns:a="http://schemas.openxmlformats.org/drawingml/2006/main" lIns="142875" tIns="114300" rIns="142875" bIns="0" anchor="t">
+          <a:bodyPr xmlns:a="http://schemas.openxmlformats.org/drawingml/2006/main" lIns="0" tIns="0" rIns="0" bIns="0" anchor="t">
+            <a:noAutofit/>
+          </a:bodyPr>
+          <a:lstStyle xmlns:a="http://schemas.openxmlformats.org/drawingml/2006/main"/>
+          <a:p xmlns:a="http://schemas.openxmlformats.org/drawingml/2006/main">
+            <a:pPr>
+              <a:defRPr sz="1725" b="1">
+                <a:solidFill>
+                  <a:srgbClr val="263C3A"/>
+                </a:solidFill>
+                <a:latin typeface="DejaVu Sans"/>
+                <a:ea typeface="DejaVu Sans"/>
+                <a:cs typeface="DejaVu Sans"/>
+              </a:defRPr>
+            </a:pPr>
+            <a:r>
+              <a:rPr sz="1725" b="1">
+                <a:solidFill>
+                  <a:srgbClr val="263C3A"/>
+                </a:solidFill>
+                <a:latin typeface="DejaVu Sans"/>
+                <a:ea typeface="DejaVu Sans"/>
+                <a:cs typeface="DejaVu Sans"/>
+              </a:rPr>
+              <a:t>3 to 6</a:t>
+            </a:r>
+          </a:p>
+        </p:txBody>
+      </p:sp>
+      <p:sp>
+        <p:nvSpPr>
+          <p:cNvPr id="15" name="">
+            <a:extLst xmlns:a="http://schemas.openxmlformats.org/drawingml/2006/main">
+              <a:ext uri="{FF2B5EF4-FFF2-40B4-BE49-F238E27FC236}">
+                <a16:creationId xmlns:a16="http://schemas.microsoft.com/office/drawing/2014/main" id="{A579691B-D921-496F-A889-57584178F081}"/>
+              </a:ext>
+            </a:extLst>
+          </p:cNvPr>
+          <p:cNvSpPr>
+            <a:spLocks xmlns:a="http://schemas.openxmlformats.org/drawingml/2006/main" noGrp="1"/>
+          </p:cNvSpPr>
+          <p:nvPr/>
+        </p:nvSpPr>
+        <p:spPr>
+          <a:xfrm xmlns:a="http://schemas.openxmlformats.org/drawingml/2006/main">
+            <a:off x="6391275" y="2990850"/>
+            <a:ext cx="4981575" cy="695325"/>
+          </a:xfrm>
+          <a:prstGeom xmlns:a="http://schemas.openxmlformats.org/drawingml/2006/main" prst="rect">
+            <a:avLst/>
+          </a:prstGeom>
+          <a:noFill xmlns:a="http://schemas.openxmlformats.org/drawingml/2006/main"/>
+          <a:ln xmlns:a="http://schemas.openxmlformats.org/drawingml/2006/main" w="0">
+            <a:noFill/>
+          </a:ln>
+        </p:spPr>
+        <p:txBody>
+          <a:bodyPr xmlns:a="http://schemas.openxmlformats.org/drawingml/2006/main" lIns="0" tIns="0" rIns="0" bIns="0" anchor="t">
             <a:noAutofit/>
           </a:bodyPr>
           <a:lstStyle xmlns:a="http://schemas.openxmlformats.org/drawingml/2006/main"/>
@@ -3142,56 +3529,152 @@
             <a:pPr>
               <a:defRPr sz="1950" b="0">
                 <a:solidFill>
-                  <a:srgbClr val="42473D"/>
+                  <a:srgbClr val="687572"/>
                 </a:solidFill>
-                <a:latin typeface="Arial"/>
-                <a:ea typeface="Arial"/>
-                <a:cs typeface="Arial"/>
+                <a:latin typeface="DejaVu Sans"/>
+                <a:ea typeface="DejaVu Sans"/>
+                <a:cs typeface="DejaVu Sans"/>
               </a:defRPr>
             </a:pPr>
             <a:r>
               <a:rPr sz="1950" b="0">
                 <a:solidFill>
-                  <a:srgbClr val="42473D"/>
+                  <a:srgbClr val="687572"/>
                 </a:solidFill>
-                <a:latin typeface="Arial"/>
-                <a:ea typeface="Arial"/>
-                <a:cs typeface="Arial"/>
+                <a:latin typeface="DejaVu Sans"/>
+                <a:ea typeface="DejaVu Sans"/>
+                <a:cs typeface="DejaVu Sans"/>
               </a:rPr>
-              <a:t>3 to 6</a:t>
+              <a:t>[Your subtopic]</a:t>
             </a:r>
           </a:p>
+        </p:txBody>
+      </p:sp>
+      <p:sp>
+        <p:nvSpPr>
+          <p:cNvPr id="16" name="">
+            <a:extLst xmlns:a="http://schemas.openxmlformats.org/drawingml/2006/main">
+              <a:ext uri="{FF2B5EF4-FFF2-40B4-BE49-F238E27FC236}">
+                <a16:creationId xmlns:a16="http://schemas.microsoft.com/office/drawing/2014/main" id="{120B7183-ABD5-457A-A48C-B74C56C18A99}"/>
+              </a:ext>
+            </a:extLst>
+          </p:cNvPr>
+          <p:cNvSpPr>
+            <a:spLocks xmlns:a="http://schemas.openxmlformats.org/drawingml/2006/main" noGrp="1"/>
+          </p:cNvSpPr>
+          <p:nvPr/>
+        </p:nvSpPr>
+        <p:spPr>
+          <a:xfrm xmlns:a="http://schemas.openxmlformats.org/drawingml/2006/main">
+            <a:off x="609600" y="4019550"/>
+            <a:ext cx="5400675" cy="1600200"/>
+          </a:xfrm>
+          <a:prstGeom xmlns:a="http://schemas.openxmlformats.org/drawingml/2006/main" prst="rect">
+            <a:avLst/>
+          </a:prstGeom>
+          <a:solidFill xmlns:a="http://schemas.openxmlformats.org/drawingml/2006/main">
+            <a:srgbClr val="EDF2F5"/>
+          </a:solidFill>
+          <a:ln xmlns:a="http://schemas.openxmlformats.org/drawingml/2006/main" w="9525">
+            <a:solidFill>
+              <a:srgbClr val="D4DFDB"/>
+            </a:solidFill>
+          </a:ln>
+        </p:spPr>
+      </p:sp>
+      <p:sp>
+        <p:nvSpPr>
+          <p:cNvPr id="17" name="">
+            <a:extLst xmlns:a="http://schemas.openxmlformats.org/drawingml/2006/main">
+              <a:ext uri="{FF2B5EF4-FFF2-40B4-BE49-F238E27FC236}">
+                <a16:creationId xmlns:a16="http://schemas.microsoft.com/office/drawing/2014/main" id="{D060A8D7-6CC2-4AA5-BA23-E2580084A337}"/>
+              </a:ext>
+            </a:extLst>
+          </p:cNvPr>
+          <p:cNvSpPr>
+            <a:spLocks xmlns:a="http://schemas.openxmlformats.org/drawingml/2006/main" noGrp="1"/>
+          </p:cNvSpPr>
+          <p:nvPr/>
+        </p:nvSpPr>
+        <p:spPr>
+          <a:xfrm xmlns:a="http://schemas.openxmlformats.org/drawingml/2006/main">
+            <a:off x="800100" y="4191000"/>
+            <a:ext cx="381000" cy="381000"/>
+          </a:xfrm>
+          <a:prstGeom xmlns:a="http://schemas.openxmlformats.org/drawingml/2006/main" prst="ellipse">
+            <a:avLst/>
+          </a:prstGeom>
+          <a:solidFill xmlns:a="http://schemas.openxmlformats.org/drawingml/2006/main">
+            <a:srgbClr val="FFFFFF"/>
+          </a:solidFill>
+          <a:ln xmlns:a="http://schemas.openxmlformats.org/drawingml/2006/main" w="0">
+            <a:noFill/>
+          </a:ln>
+        </p:spPr>
+      </p:sp>
+      <p:sp>
+        <p:nvSpPr>
+          <p:cNvPr id="18" name="">
+            <a:extLst xmlns:a="http://schemas.openxmlformats.org/drawingml/2006/main">
+              <a:ext uri="{FF2B5EF4-FFF2-40B4-BE49-F238E27FC236}">
+                <a16:creationId xmlns:a16="http://schemas.microsoft.com/office/drawing/2014/main" id="{2FBF78B2-11CC-48AE-A47C-3677D4072346}"/>
+              </a:ext>
+            </a:extLst>
+          </p:cNvPr>
+          <p:cNvSpPr>
+            <a:spLocks xmlns:a="http://schemas.openxmlformats.org/drawingml/2006/main" noGrp="1"/>
+          </p:cNvSpPr>
+          <p:nvPr/>
+        </p:nvSpPr>
+        <p:spPr>
+          <a:xfrm xmlns:a="http://schemas.openxmlformats.org/drawingml/2006/main">
+            <a:off x="857250" y="4257675"/>
+            <a:ext cx="342900" cy="285750"/>
+          </a:xfrm>
+          <a:prstGeom xmlns:a="http://schemas.openxmlformats.org/drawingml/2006/main" prst="rect">
+            <a:avLst/>
+          </a:prstGeom>
+          <a:noFill xmlns:a="http://schemas.openxmlformats.org/drawingml/2006/main"/>
+          <a:ln xmlns:a="http://schemas.openxmlformats.org/drawingml/2006/main" w="0">
+            <a:noFill/>
+          </a:ln>
+        </p:spPr>
+        <p:txBody>
+          <a:bodyPr xmlns:a="http://schemas.openxmlformats.org/drawingml/2006/main" lIns="0" tIns="0" rIns="0" bIns="0" anchor="t">
+            <a:noAutofit/>
+          </a:bodyPr>
+          <a:lstStyle xmlns:a="http://schemas.openxmlformats.org/drawingml/2006/main"/>
           <a:p xmlns:a="http://schemas.openxmlformats.org/drawingml/2006/main">
             <a:pPr>
-              <a:defRPr sz="1950" b="0">
+              <a:defRPr sz="1350" b="1">
                 <a:solidFill>
-                  <a:srgbClr val="42473D"/>
+                  <a:srgbClr val="263C3A"/>
                 </a:solidFill>
-                <a:latin typeface="Arial"/>
-                <a:ea typeface="Arial"/>
-                <a:cs typeface="Arial"/>
+                <a:latin typeface="DejaVu Sans"/>
+                <a:ea typeface="DejaVu Sans"/>
+                <a:cs typeface="DejaVu Sans"/>
               </a:defRPr>
             </a:pPr>
             <a:r>
-              <a:rPr sz="1950" b="0">
+              <a:rPr sz="1350" b="1">
                 <a:solidFill>
-                  <a:srgbClr val="42473D"/>
+                  <a:srgbClr val="263C3A"/>
                 </a:solidFill>
-                <a:latin typeface="Arial"/>
-                <a:ea typeface="Arial"/>
-                <a:cs typeface="Arial"/>
+                <a:latin typeface="DejaVu Sans"/>
+                <a:ea typeface="DejaVu Sans"/>
+                <a:cs typeface="DejaVu Sans"/>
               </a:rPr>
-              <a:t>[Add a subtopic]</a:t>
+              <a:t>03</a:t>
             </a:r>
           </a:p>
         </p:txBody>
       </p:sp>
       <p:sp>
         <p:nvSpPr>
-          <p:cNvPr id="6" name="">
+          <p:cNvPr id="19" name="">
             <a:extLst xmlns:a="http://schemas.openxmlformats.org/drawingml/2006/main">
               <a:ext uri="{FF2B5EF4-FFF2-40B4-BE49-F238E27FC236}">
-                <a16:creationId xmlns:a16="http://schemas.microsoft.com/office/drawing/2014/main" id="{74298BB5-ACFA-4F04-9820-417FF94BEA83}"/>
+                <a16:creationId xmlns:a16="http://schemas.microsoft.com/office/drawing/2014/main" id="{542D1775-0EF0-4978-84B0-564695169FCA}"/>
               </a:ext>
             </a:extLst>
           </p:cNvPr>
@@ -3202,21 +3685,76 @@
         </p:nvSpPr>
         <p:spPr>
           <a:xfrm xmlns:a="http://schemas.openxmlformats.org/drawingml/2006/main">
-            <a:off x="609600" y="3943350"/>
-            <a:ext cx="5400675" cy="1581150"/>
+            <a:off x="1352550" y="4238625"/>
+            <a:ext cx="4467225" cy="428625"/>
           </a:xfrm>
           <a:prstGeom xmlns:a="http://schemas.openxmlformats.org/drawingml/2006/main" prst="rect">
             <a:avLst/>
           </a:prstGeom>
           <a:noFill xmlns:a="http://schemas.openxmlformats.org/drawingml/2006/main"/>
-          <a:ln xmlns:a="http://schemas.openxmlformats.org/drawingml/2006/main" w="9525">
-            <a:solidFill>
-              <a:srgbClr val="CBD0C4"/>
-            </a:solidFill>
+          <a:ln xmlns:a="http://schemas.openxmlformats.org/drawingml/2006/main" w="0">
+            <a:noFill/>
           </a:ln>
         </p:spPr>
         <p:txBody>
-          <a:bodyPr xmlns:a="http://schemas.openxmlformats.org/drawingml/2006/main" lIns="142875" tIns="114300" rIns="142875" bIns="0" anchor="t">
+          <a:bodyPr xmlns:a="http://schemas.openxmlformats.org/drawingml/2006/main" lIns="0" tIns="0" rIns="0" bIns="0" anchor="t">
+            <a:noAutofit/>
+          </a:bodyPr>
+          <a:lstStyle xmlns:a="http://schemas.openxmlformats.org/drawingml/2006/main"/>
+          <a:p xmlns:a="http://schemas.openxmlformats.org/drawingml/2006/main">
+            <a:pPr>
+              <a:defRPr sz="1725" b="1">
+                <a:solidFill>
+                  <a:srgbClr val="263C3A"/>
+                </a:solidFill>
+                <a:latin typeface="DejaVu Sans"/>
+                <a:ea typeface="DejaVu Sans"/>
+                <a:cs typeface="DejaVu Sans"/>
+              </a:defRPr>
+            </a:pPr>
+            <a:r>
+              <a:rPr sz="1725" b="1">
+                <a:solidFill>
+                  <a:srgbClr val="263C3A"/>
+                </a:solidFill>
+                <a:latin typeface="DejaVu Sans"/>
+                <a:ea typeface="DejaVu Sans"/>
+                <a:cs typeface="DejaVu Sans"/>
+              </a:rPr>
+              <a:t>9 to 12</a:t>
+            </a:r>
+          </a:p>
+        </p:txBody>
+      </p:sp>
+      <p:sp>
+        <p:nvSpPr>
+          <p:cNvPr id="20" name="">
+            <a:extLst xmlns:a="http://schemas.openxmlformats.org/drawingml/2006/main">
+              <a:ext uri="{FF2B5EF4-FFF2-40B4-BE49-F238E27FC236}">
+                <a16:creationId xmlns:a16="http://schemas.microsoft.com/office/drawing/2014/main" id="{DFB52CD2-4AC7-448C-A78E-749D7828AC5F}"/>
+              </a:ext>
+            </a:extLst>
+          </p:cNvPr>
+          <p:cNvSpPr>
+            <a:spLocks xmlns:a="http://schemas.openxmlformats.org/drawingml/2006/main" noGrp="1"/>
+          </p:cNvSpPr>
+          <p:nvPr/>
+        </p:nvSpPr>
+        <p:spPr>
+          <a:xfrm xmlns:a="http://schemas.openxmlformats.org/drawingml/2006/main">
+            <a:off x="819150" y="4762500"/>
+            <a:ext cx="4981575" cy="695325"/>
+          </a:xfrm>
+          <a:prstGeom xmlns:a="http://schemas.openxmlformats.org/drawingml/2006/main" prst="rect">
+            <a:avLst/>
+          </a:prstGeom>
+          <a:noFill xmlns:a="http://schemas.openxmlformats.org/drawingml/2006/main"/>
+          <a:ln xmlns:a="http://schemas.openxmlformats.org/drawingml/2006/main" w="0">
+            <a:noFill/>
+          </a:ln>
+        </p:spPr>
+        <p:txBody>
+          <a:bodyPr xmlns:a="http://schemas.openxmlformats.org/drawingml/2006/main" lIns="0" tIns="0" rIns="0" bIns="0" anchor="t">
             <a:noAutofit/>
           </a:bodyPr>
           <a:lstStyle xmlns:a="http://schemas.openxmlformats.org/drawingml/2006/main"/>
@@ -3224,56 +3762,152 @@
             <a:pPr>
               <a:defRPr sz="1950" b="0">
                 <a:solidFill>
-                  <a:srgbClr val="42473D"/>
+                  <a:srgbClr val="687572"/>
                 </a:solidFill>
-                <a:latin typeface="Arial"/>
-                <a:ea typeface="Arial"/>
-                <a:cs typeface="Arial"/>
+                <a:latin typeface="DejaVu Sans"/>
+                <a:ea typeface="DejaVu Sans"/>
+                <a:cs typeface="DejaVu Sans"/>
               </a:defRPr>
             </a:pPr>
             <a:r>
               <a:rPr sz="1950" b="0">
                 <a:solidFill>
-                  <a:srgbClr val="42473D"/>
+                  <a:srgbClr val="687572"/>
                 </a:solidFill>
-                <a:latin typeface="Arial"/>
-                <a:ea typeface="Arial"/>
-                <a:cs typeface="Arial"/>
+                <a:latin typeface="DejaVu Sans"/>
+                <a:ea typeface="DejaVu Sans"/>
+                <a:cs typeface="DejaVu Sans"/>
               </a:rPr>
-              <a:t>9 to 12</a:t>
+              <a:t>[Your subtopic]</a:t>
             </a:r>
           </a:p>
+        </p:txBody>
+      </p:sp>
+      <p:sp>
+        <p:nvSpPr>
+          <p:cNvPr id="21" name="">
+            <a:extLst xmlns:a="http://schemas.openxmlformats.org/drawingml/2006/main">
+              <a:ext uri="{FF2B5EF4-FFF2-40B4-BE49-F238E27FC236}">
+                <a16:creationId xmlns:a16="http://schemas.microsoft.com/office/drawing/2014/main" id="{E5514636-0F42-415F-8B9A-C88B77A10A28}"/>
+              </a:ext>
+            </a:extLst>
+          </p:cNvPr>
+          <p:cNvSpPr>
+            <a:spLocks xmlns:a="http://schemas.openxmlformats.org/drawingml/2006/main" noGrp="1"/>
+          </p:cNvSpPr>
+          <p:nvPr/>
+        </p:nvSpPr>
+        <p:spPr>
+          <a:xfrm xmlns:a="http://schemas.openxmlformats.org/drawingml/2006/main">
+            <a:off x="6181725" y="4019550"/>
+            <a:ext cx="5400675" cy="1600200"/>
+          </a:xfrm>
+          <a:prstGeom xmlns:a="http://schemas.openxmlformats.org/drawingml/2006/main" prst="rect">
+            <a:avLst/>
+          </a:prstGeom>
+          <a:solidFill xmlns:a="http://schemas.openxmlformats.org/drawingml/2006/main">
+            <a:srgbClr val="EAF1EC"/>
+          </a:solidFill>
+          <a:ln xmlns:a="http://schemas.openxmlformats.org/drawingml/2006/main" w="9525">
+            <a:solidFill>
+              <a:srgbClr val="D4DFDB"/>
+            </a:solidFill>
+          </a:ln>
+        </p:spPr>
+      </p:sp>
+      <p:sp>
+        <p:nvSpPr>
+          <p:cNvPr id="22" name="">
+            <a:extLst xmlns:a="http://schemas.openxmlformats.org/drawingml/2006/main">
+              <a:ext uri="{FF2B5EF4-FFF2-40B4-BE49-F238E27FC236}">
+                <a16:creationId xmlns:a16="http://schemas.microsoft.com/office/drawing/2014/main" id="{75DF4752-5B26-4E1C-AA7D-945CEA35947D}"/>
+              </a:ext>
+            </a:extLst>
+          </p:cNvPr>
+          <p:cNvSpPr>
+            <a:spLocks xmlns:a="http://schemas.openxmlformats.org/drawingml/2006/main" noGrp="1"/>
+          </p:cNvSpPr>
+          <p:nvPr/>
+        </p:nvSpPr>
+        <p:spPr>
+          <a:xfrm xmlns:a="http://schemas.openxmlformats.org/drawingml/2006/main">
+            <a:off x="6372225" y="4191000"/>
+            <a:ext cx="381000" cy="381000"/>
+          </a:xfrm>
+          <a:prstGeom xmlns:a="http://schemas.openxmlformats.org/drawingml/2006/main" prst="ellipse">
+            <a:avLst/>
+          </a:prstGeom>
+          <a:solidFill xmlns:a="http://schemas.openxmlformats.org/drawingml/2006/main">
+            <a:srgbClr val="FFFFFF"/>
+          </a:solidFill>
+          <a:ln xmlns:a="http://schemas.openxmlformats.org/drawingml/2006/main" w="0">
+            <a:noFill/>
+          </a:ln>
+        </p:spPr>
+      </p:sp>
+      <p:sp>
+        <p:nvSpPr>
+          <p:cNvPr id="23" name="">
+            <a:extLst xmlns:a="http://schemas.openxmlformats.org/drawingml/2006/main">
+              <a:ext uri="{FF2B5EF4-FFF2-40B4-BE49-F238E27FC236}">
+                <a16:creationId xmlns:a16="http://schemas.microsoft.com/office/drawing/2014/main" id="{EF862006-EEE0-4787-B3A1-713A9E962BDF}"/>
+              </a:ext>
+            </a:extLst>
+          </p:cNvPr>
+          <p:cNvSpPr>
+            <a:spLocks xmlns:a="http://schemas.openxmlformats.org/drawingml/2006/main" noGrp="1"/>
+          </p:cNvSpPr>
+          <p:nvPr/>
+        </p:nvSpPr>
+        <p:spPr>
+          <a:xfrm xmlns:a="http://schemas.openxmlformats.org/drawingml/2006/main">
+            <a:off x="6429375" y="4257675"/>
+            <a:ext cx="342900" cy="285750"/>
+          </a:xfrm>
+          <a:prstGeom xmlns:a="http://schemas.openxmlformats.org/drawingml/2006/main" prst="rect">
+            <a:avLst/>
+          </a:prstGeom>
+          <a:noFill xmlns:a="http://schemas.openxmlformats.org/drawingml/2006/main"/>
+          <a:ln xmlns:a="http://schemas.openxmlformats.org/drawingml/2006/main" w="0">
+            <a:noFill/>
+          </a:ln>
+        </p:spPr>
+        <p:txBody>
+          <a:bodyPr xmlns:a="http://schemas.openxmlformats.org/drawingml/2006/main" lIns="0" tIns="0" rIns="0" bIns="0" anchor="t">
+            <a:noAutofit/>
+          </a:bodyPr>
+          <a:lstStyle xmlns:a="http://schemas.openxmlformats.org/drawingml/2006/main"/>
           <a:p xmlns:a="http://schemas.openxmlformats.org/drawingml/2006/main">
             <a:pPr>
-              <a:defRPr sz="1950" b="0">
+              <a:defRPr sz="1350" b="1">
                 <a:solidFill>
-                  <a:srgbClr val="42473D"/>
+                  <a:srgbClr val="263C3A"/>
                 </a:solidFill>
-                <a:latin typeface="Arial"/>
-                <a:ea typeface="Arial"/>
-                <a:cs typeface="Arial"/>
+                <a:latin typeface="DejaVu Sans"/>
+                <a:ea typeface="DejaVu Sans"/>
+                <a:cs typeface="DejaVu Sans"/>
               </a:defRPr>
             </a:pPr>
             <a:r>
-              <a:rPr sz="1950" b="0">
+              <a:rPr sz="1350" b="1">
                 <a:solidFill>
-                  <a:srgbClr val="42473D"/>
+                  <a:srgbClr val="263C3A"/>
                 </a:solidFill>
-                <a:latin typeface="Arial"/>
-                <a:ea typeface="Arial"/>
-                <a:cs typeface="Arial"/>
+                <a:latin typeface="DejaVu Sans"/>
+                <a:ea typeface="DejaVu Sans"/>
+                <a:cs typeface="DejaVu Sans"/>
               </a:rPr>
-              <a:t>[Add a subtopic]</a:t>
+              <a:t>04</a:t>
             </a:r>
           </a:p>
         </p:txBody>
       </p:sp>
       <p:sp>
         <p:nvSpPr>
-          <p:cNvPr id="7" name="">
+          <p:cNvPr id="24" name="">
             <a:extLst xmlns:a="http://schemas.openxmlformats.org/drawingml/2006/main">
               <a:ext uri="{FF2B5EF4-FFF2-40B4-BE49-F238E27FC236}">
-                <a16:creationId xmlns:a16="http://schemas.microsoft.com/office/drawing/2014/main" id="{D6ECEFF0-7515-4275-8875-81AE928C3B45}"/>
+                <a16:creationId xmlns:a16="http://schemas.microsoft.com/office/drawing/2014/main" id="{343BF095-2AF8-449E-84BE-3DFF8A809EE2}"/>
               </a:ext>
             </a:extLst>
           </p:cNvPr>
@@ -3284,21 +3918,76 @@
         </p:nvSpPr>
         <p:spPr>
           <a:xfrm xmlns:a="http://schemas.openxmlformats.org/drawingml/2006/main">
-            <a:off x="6181725" y="3943350"/>
-            <a:ext cx="5400675" cy="1581150"/>
+            <a:off x="6924675" y="4238625"/>
+            <a:ext cx="4467225" cy="428625"/>
           </a:xfrm>
           <a:prstGeom xmlns:a="http://schemas.openxmlformats.org/drawingml/2006/main" prst="rect">
             <a:avLst/>
           </a:prstGeom>
           <a:noFill xmlns:a="http://schemas.openxmlformats.org/drawingml/2006/main"/>
-          <a:ln xmlns:a="http://schemas.openxmlformats.org/drawingml/2006/main" w="9525">
-            <a:solidFill>
-              <a:srgbClr val="CBD0C4"/>
-            </a:solidFill>
+          <a:ln xmlns:a="http://schemas.openxmlformats.org/drawingml/2006/main" w="0">
+            <a:noFill/>
           </a:ln>
         </p:spPr>
         <p:txBody>
-          <a:bodyPr xmlns:a="http://schemas.openxmlformats.org/drawingml/2006/main" lIns="142875" tIns="114300" rIns="142875" bIns="0" anchor="t">
+          <a:bodyPr xmlns:a="http://schemas.openxmlformats.org/drawingml/2006/main" lIns="0" tIns="0" rIns="0" bIns="0" anchor="t">
+            <a:noAutofit/>
+          </a:bodyPr>
+          <a:lstStyle xmlns:a="http://schemas.openxmlformats.org/drawingml/2006/main"/>
+          <a:p xmlns:a="http://schemas.openxmlformats.org/drawingml/2006/main">
+            <a:pPr>
+              <a:defRPr sz="1725" b="1">
+                <a:solidFill>
+                  <a:srgbClr val="263C3A"/>
+                </a:solidFill>
+                <a:latin typeface="DejaVu Sans"/>
+                <a:ea typeface="DejaVu Sans"/>
+                <a:cs typeface="DejaVu Sans"/>
+              </a:defRPr>
+            </a:pPr>
+            <a:r>
+              <a:rPr sz="1725" b="1">
+                <a:solidFill>
+                  <a:srgbClr val="263C3A"/>
+                </a:solidFill>
+                <a:latin typeface="DejaVu Sans"/>
+                <a:ea typeface="DejaVu Sans"/>
+                <a:cs typeface="DejaVu Sans"/>
+              </a:rPr>
+              <a:t>6 to 9</a:t>
+            </a:r>
+          </a:p>
+        </p:txBody>
+      </p:sp>
+      <p:sp>
+        <p:nvSpPr>
+          <p:cNvPr id="25" name="">
+            <a:extLst xmlns:a="http://schemas.openxmlformats.org/drawingml/2006/main">
+              <a:ext uri="{FF2B5EF4-FFF2-40B4-BE49-F238E27FC236}">
+                <a16:creationId xmlns:a16="http://schemas.microsoft.com/office/drawing/2014/main" id="{24640839-33B9-40DD-B4B9-41E0227DD2A9}"/>
+              </a:ext>
+            </a:extLst>
+          </p:cNvPr>
+          <p:cNvSpPr>
+            <a:spLocks xmlns:a="http://schemas.openxmlformats.org/drawingml/2006/main" noGrp="1"/>
+          </p:cNvSpPr>
+          <p:nvPr/>
+        </p:nvSpPr>
+        <p:spPr>
+          <a:xfrm xmlns:a="http://schemas.openxmlformats.org/drawingml/2006/main">
+            <a:off x="6391275" y="4762500"/>
+            <a:ext cx="4981575" cy="695325"/>
+          </a:xfrm>
+          <a:prstGeom xmlns:a="http://schemas.openxmlformats.org/drawingml/2006/main" prst="rect">
+            <a:avLst/>
+          </a:prstGeom>
+          <a:noFill xmlns:a="http://schemas.openxmlformats.org/drawingml/2006/main"/>
+          <a:ln xmlns:a="http://schemas.openxmlformats.org/drawingml/2006/main" w="0">
+            <a:noFill/>
+          </a:ln>
+        </p:spPr>
+        <p:txBody>
+          <a:bodyPr xmlns:a="http://schemas.openxmlformats.org/drawingml/2006/main" lIns="0" tIns="0" rIns="0" bIns="0" anchor="t">
             <a:noAutofit/>
           </a:bodyPr>
           <a:lstStyle xmlns:a="http://schemas.openxmlformats.org/drawingml/2006/main"/>
@@ -3306,56 +3995,33 @@
             <a:pPr>
               <a:defRPr sz="1950" b="0">
                 <a:solidFill>
-                  <a:srgbClr val="42473D"/>
+                  <a:srgbClr val="687572"/>
                 </a:solidFill>
-                <a:latin typeface="Arial"/>
-                <a:ea typeface="Arial"/>
-                <a:cs typeface="Arial"/>
+                <a:latin typeface="DejaVu Sans"/>
+                <a:ea typeface="DejaVu Sans"/>
+                <a:cs typeface="DejaVu Sans"/>
               </a:defRPr>
             </a:pPr>
             <a:r>
               <a:rPr sz="1950" b="0">
                 <a:solidFill>
-                  <a:srgbClr val="42473D"/>
+                  <a:srgbClr val="687572"/>
                 </a:solidFill>
-                <a:latin typeface="Arial"/>
-                <a:ea typeface="Arial"/>
-                <a:cs typeface="Arial"/>
+                <a:latin typeface="DejaVu Sans"/>
+                <a:ea typeface="DejaVu Sans"/>
+                <a:cs typeface="DejaVu Sans"/>
               </a:rPr>
-              <a:t>6 to 9</a:t>
-            </a:r>
-          </a:p>
-          <a:p xmlns:a="http://schemas.openxmlformats.org/drawingml/2006/main">
-            <a:pPr>
-              <a:defRPr sz="1950" b="0">
-                <a:solidFill>
-                  <a:srgbClr val="42473D"/>
-                </a:solidFill>
-                <a:latin typeface="Arial"/>
-                <a:ea typeface="Arial"/>
-                <a:cs typeface="Arial"/>
-              </a:defRPr>
-            </a:pPr>
-            <a:r>
-              <a:rPr sz="1950" b="0">
-                <a:solidFill>
-                  <a:srgbClr val="42473D"/>
-                </a:solidFill>
-                <a:latin typeface="Arial"/>
-                <a:ea typeface="Arial"/>
-                <a:cs typeface="Arial"/>
-              </a:rPr>
-              <a:t>[Add a subtopic]</a:t>
+              <a:t>[Your subtopic]</a:t>
             </a:r>
           </a:p>
         </p:txBody>
       </p:sp>
       <p:sp>
         <p:nvSpPr>
-          <p:cNvPr id="8" name="">
+          <p:cNvPr id="26" name="">
             <a:extLst xmlns:a="http://schemas.openxmlformats.org/drawingml/2006/main">
               <a:ext uri="{FF2B5EF4-FFF2-40B4-BE49-F238E27FC236}">
-                <a16:creationId xmlns:a16="http://schemas.microsoft.com/office/drawing/2014/main" id="{9DDB5308-1403-4E0F-A860-78305E4A730C}"/>
+                <a16:creationId xmlns:a16="http://schemas.microsoft.com/office/drawing/2014/main" id="{6E74E9BC-F948-4D74-BF48-B82EEB848771}"/>
               </a:ext>
             </a:extLst>
           </p:cNvPr>
@@ -3367,7 +4033,37 @@
         <p:spPr>
           <a:xfrm xmlns:a="http://schemas.openxmlformats.org/drawingml/2006/main">
             <a:off x="609600" y="5953125"/>
-            <a:ext cx="10972800" cy="381000"/>
+            <a:ext cx="10972800" cy="9525"/>
+          </a:xfrm>
+          <a:prstGeom xmlns:a="http://schemas.openxmlformats.org/drawingml/2006/main" prst="rect">
+            <a:avLst/>
+          </a:prstGeom>
+          <a:solidFill xmlns:a="http://schemas.openxmlformats.org/drawingml/2006/main">
+            <a:srgbClr val="A9BDB7"/>
+          </a:solidFill>
+          <a:ln xmlns:a="http://schemas.openxmlformats.org/drawingml/2006/main" w="0">
+            <a:noFill/>
+          </a:ln>
+        </p:spPr>
+      </p:sp>
+      <p:sp>
+        <p:nvSpPr>
+          <p:cNvPr id="27" name="">
+            <a:extLst xmlns:a="http://schemas.openxmlformats.org/drawingml/2006/main">
+              <a:ext uri="{FF2B5EF4-FFF2-40B4-BE49-F238E27FC236}">
+                <a16:creationId xmlns:a16="http://schemas.microsoft.com/office/drawing/2014/main" id="{3E91AB41-4353-4A0B-87D7-DEB2F2E68A6D}"/>
+              </a:ext>
+            </a:extLst>
+          </p:cNvPr>
+          <p:cNvSpPr>
+            <a:spLocks xmlns:a="http://schemas.openxmlformats.org/drawingml/2006/main" noGrp="1"/>
+          </p:cNvSpPr>
+          <p:nvPr/>
+        </p:nvSpPr>
+        <p:spPr>
+          <a:xfrm xmlns:a="http://schemas.openxmlformats.org/drawingml/2006/main">
+            <a:off x="609600" y="6191250"/>
+            <a:ext cx="3238500" cy="361950"/>
           </a:xfrm>
           <a:prstGeom xmlns:a="http://schemas.openxmlformats.org/drawingml/2006/main" prst="rect">
             <a:avLst/>
@@ -3384,35 +4080,35 @@
           <a:lstStyle xmlns:a="http://schemas.openxmlformats.org/drawingml/2006/main"/>
           <a:p xmlns:a="http://schemas.openxmlformats.org/drawingml/2006/main">
             <a:pPr>
-              <a:defRPr sz="1800" b="0">
+              <a:defRPr sz="1650" b="0">
                 <a:solidFill>
-                  <a:srgbClr val="28534A"/>
+                  <a:srgbClr val="687572"/>
                 </a:solidFill>
-                <a:latin typeface="Arial"/>
-                <a:ea typeface="Arial"/>
-                <a:cs typeface="Arial"/>
+                <a:latin typeface="DejaVu Sans"/>
+                <a:ea typeface="DejaVu Sans"/>
+                <a:cs typeface="DejaVu Sans"/>
               </a:defRPr>
             </a:pPr>
             <a:r>
-              <a:rPr sz="1800" b="0">
+              <a:rPr sz="1650" b="0">
                 <a:solidFill>
-                  <a:srgbClr val="28534A"/>
+                  <a:srgbClr val="687572"/>
                 </a:solidFill>
-                <a:latin typeface="Arial"/>
-                <a:ea typeface="Arial"/>
-                <a:cs typeface="Arial"/>
+                <a:latin typeface="DejaVu Sans"/>
+                <a:ea typeface="DejaVu Sans"/>
+                <a:cs typeface="DejaVu Sans"/>
               </a:rPr>
-              <a:t>Time: [Add minutes]     Check: [Add your feedback routine]</a:t>
+              <a:t>Time: [Minutes]</a:t>
             </a:r>
           </a:p>
         </p:txBody>
       </p:sp>
       <p:sp>
         <p:nvSpPr>
-          <p:cNvPr id="9" name="">
+          <p:cNvPr id="28" name="">
             <a:extLst xmlns:a="http://schemas.openxmlformats.org/drawingml/2006/main">
               <a:ext uri="{FF2B5EF4-FFF2-40B4-BE49-F238E27FC236}">
-                <a16:creationId xmlns:a16="http://schemas.microsoft.com/office/drawing/2014/main" id="{DD646247-5AB8-4FF0-933E-A3D6B1001FFF}"/>
+                <a16:creationId xmlns:a16="http://schemas.microsoft.com/office/drawing/2014/main" id="{46B3A6AB-F27B-41B6-AFC2-A592F9DBC233}"/>
               </a:ext>
             </a:extLst>
           </p:cNvPr>
@@ -3423,8 +4119,8 @@
         </p:nvSpPr>
         <p:spPr>
           <a:xfrm xmlns:a="http://schemas.openxmlformats.org/drawingml/2006/main">
-            <a:off x="609600" y="6534150"/>
-            <a:ext cx="10972800" cy="209550"/>
+            <a:off x="4286250" y="6191250"/>
+            <a:ext cx="7296150" cy="361950"/>
           </a:xfrm>
           <a:prstGeom xmlns:a="http://schemas.openxmlformats.org/drawingml/2006/main" prst="rect">
             <a:avLst/>
@@ -3441,25 +4137,25 @@
           <a:lstStyle xmlns:a="http://schemas.openxmlformats.org/drawingml/2006/main"/>
           <a:p xmlns:a="http://schemas.openxmlformats.org/drawingml/2006/main">
             <a:pPr>
-              <a:defRPr sz="1050" b="0">
+              <a:defRPr sz="1650" b="0">
                 <a:solidFill>
-                  <a:srgbClr val="62675C"/>
+                  <a:srgbClr val="687572"/>
                 </a:solidFill>
-                <a:latin typeface="Arial"/>
-                <a:ea typeface="Arial"/>
-                <a:cs typeface="Arial"/>
+                <a:latin typeface="DejaVu Sans"/>
+                <a:ea typeface="DejaVu Sans"/>
+                <a:cs typeface="DejaVu Sans"/>
               </a:defRPr>
             </a:pPr>
             <a:r>
-              <a:rPr sz="1050" b="0">
+              <a:rPr sz="1650" b="0">
                 <a:solidFill>
-                  <a:srgbClr val="62675C"/>
+                  <a:srgbClr val="687572"/>
                 </a:solidFill>
-                <a:latin typeface="Arial"/>
-                <a:ea typeface="Arial"/>
-                <a:cs typeface="Arial"/>
+                <a:latin typeface="DejaVu Sans"/>
+                <a:ea typeface="DejaVu Sans"/>
+                <a:cs typeface="DejaVu Sans"/>
               </a:rPr>
-              <a:t>TNT Teaching Tools   Editable classroom template   Source and teacher guidance in speaker notes</a:t>
+              <a:t>Feedback: [Your checking routine]</a:t>
             </a:r>
           </a:p>
         </p:txBody>
@@ -3467,7 +4163,7 @@
     </p:spTree>
     <p:extLst>
       <p:ext uri="{BB962C8B-B14F-4D97-AF65-F5344CB8AC3E}">
-        <p14:creationId xmlns:p14="http://schemas.microsoft.com/office/powerpoint/2010/main" val="1090675397"/>
+        <p14:creationId xmlns:p14="http://schemas.microsoft.com/office/powerpoint/2010/main" val="1992491921"/>
       </p:ext>
     </p:extLst>
   </p:cSld>
